--- a/presentations/aws-security-agent-presentation.pptx
+++ b/presentations/aws-security-agent-presentation.pptx
@@ -19537,7 +19537,7 @@
         <p:spPr>
           <a:xfrm>
             <a:off x="502920" y="2295144"/>
-            <a:ext cx="11183112" cy="795528"/>
+            <a:ext cx="11183112" cy="969264"/>
           </a:xfrm>
           <a:prstGeom prst="roundRect">
             <a:avLst>
@@ -19581,28 +19581,28 @@
         </p:nvSpPr>
         <p:spPr>
           <a:xfrm>
-            <a:off x="704088" y="2450592"/>
-            <a:ext cx="10789920" cy="475488"/>
-          </a:xfrm>
-          <a:prstGeom prst="rect">
-            <a:avLst/>
-          </a:prstGeom>
-          <a:noFill/>
-        </p:spPr>
-        <p:txBody>
-          <a:bodyPr wrap="square" lIns="0" rIns="0" tIns="0" bIns="0" anchor="t">
-            <a:spAutoFit/>
-          </a:bodyPr>
-          <a:lstStyle/>
-          <a:p>
-            <a:pPr>
-              <a:lnSpc>
-                <a:spcPct val="112000"/>
-              </a:lnSpc>
-              <a:spcAft>
-                <a:spcPts val="300"/>
-              </a:spcAft>
-              <a:defRPr sz="1400" b="0">
+            <a:off x="704088" y="2432304"/>
+            <a:ext cx="10789920" cy="713232"/>
+          </a:xfrm>
+          <a:prstGeom prst="rect">
+            <a:avLst/>
+          </a:prstGeom>
+          <a:noFill/>
+        </p:spPr>
+        <p:txBody>
+          <a:bodyPr wrap="square" lIns="0" rIns="0" tIns="0" bIns="0" anchor="t">
+            <a:spAutoFit/>
+          </a:bodyPr>
+          <a:lstStyle/>
+          <a:p>
+            <a:pPr>
+              <a:lnSpc>
+                <a:spcPct val="112000"/>
+              </a:lnSpc>
+              <a:spcAft>
+                <a:spcPts val="300"/>
+              </a:spcAft>
+              <a:defRPr sz="1500" b="0">
                 <a:solidFill>
                   <a:srgbClr val="FFFFFF"/>
                 </a:solidFill>
@@ -19623,7 +19623,7 @@
         </p:nvSpPr>
         <p:spPr>
           <a:xfrm>
-            <a:off x="502920" y="3264408"/>
+            <a:off x="502920" y="3429000"/>
             <a:ext cx="3200400" cy="201168"/>
           </a:xfrm>
           <a:prstGeom prst="rect">
@@ -19665,7 +19665,7 @@
         </p:nvSpPr>
         <p:spPr>
           <a:xfrm>
-            <a:off x="502920" y="3520439"/>
+            <a:off x="502920" y="3685032"/>
             <a:ext cx="3337560" cy="612648"/>
           </a:xfrm>
           <a:prstGeom prst="rect">
@@ -19707,7 +19707,7 @@
         </p:nvSpPr>
         <p:spPr>
           <a:xfrm>
-            <a:off x="502920" y="4224528"/>
+            <a:off x="502920" y="4389120"/>
             <a:ext cx="3200400" cy="201168"/>
           </a:xfrm>
           <a:prstGeom prst="rect">
@@ -19749,7 +19749,7 @@
         </p:nvSpPr>
         <p:spPr>
           <a:xfrm>
-            <a:off x="502920" y="4480560"/>
+            <a:off x="502920" y="4645152"/>
             <a:ext cx="3337560" cy="612648"/>
           </a:xfrm>
           <a:prstGeom prst="rect">
@@ -19791,7 +19791,7 @@
         </p:nvSpPr>
         <p:spPr>
           <a:xfrm>
-            <a:off x="502920" y="5184648"/>
+            <a:off x="502920" y="5349240"/>
             <a:ext cx="3200400" cy="201168"/>
           </a:xfrm>
           <a:prstGeom prst="rect">
@@ -19833,7 +19833,7 @@
         </p:nvSpPr>
         <p:spPr>
           <a:xfrm>
-            <a:off x="502920" y="5440680"/>
+            <a:off x="502920" y="5605272"/>
             <a:ext cx="3337560" cy="612648"/>
           </a:xfrm>
           <a:prstGeom prst="rect">
@@ -19875,8 +19875,8 @@
         </p:nvSpPr>
         <p:spPr>
           <a:xfrm>
-            <a:off x="4096512" y="3246120"/>
-            <a:ext cx="7589520" cy="534009"/>
+            <a:off x="4096512" y="3410712"/>
+            <a:ext cx="7589520" cy="501091"/>
           </a:xfrm>
           <a:prstGeom prst="roundRect">
             <a:avLst>
@@ -19920,7 +19920,7 @@
         </p:nvSpPr>
         <p:spPr>
           <a:xfrm>
-            <a:off x="4233672" y="3355848"/>
+            <a:off x="4233672" y="3520440"/>
             <a:ext cx="594360" cy="256032"/>
           </a:xfrm>
           <a:prstGeom prst="rect">
@@ -19962,7 +19962,7 @@
         </p:nvSpPr>
         <p:spPr>
           <a:xfrm>
-            <a:off x="4937760" y="3319272"/>
+            <a:off x="4937760" y="3483864"/>
             <a:ext cx="6537960" cy="219456"/>
           </a:xfrm>
           <a:prstGeom prst="rect">
@@ -20004,28 +20004,28 @@
         </p:nvSpPr>
         <p:spPr>
           <a:xfrm>
-            <a:off x="4937760" y="3557015"/>
-            <a:ext cx="6537960" cy="232257"/>
-          </a:xfrm>
-          <a:prstGeom prst="rect">
-            <a:avLst/>
-          </a:prstGeom>
-          <a:noFill/>
-        </p:spPr>
-        <p:txBody>
-          <a:bodyPr wrap="square" lIns="0" rIns="0" tIns="0" bIns="0" anchor="t">
-            <a:spAutoFit/>
-          </a:bodyPr>
-          <a:lstStyle/>
-          <a:p>
-            <a:pPr>
-              <a:lnSpc>
-                <a:spcPct val="112000"/>
-              </a:lnSpc>
-              <a:spcAft>
-                <a:spcPts val="300"/>
-              </a:spcAft>
-              <a:defRPr sz="1400" b="0">
+            <a:off x="4937760" y="3685032"/>
+            <a:ext cx="6537960" cy="263347"/>
+          </a:xfrm>
+          <a:prstGeom prst="rect">
+            <a:avLst/>
+          </a:prstGeom>
+          <a:noFill/>
+        </p:spPr>
+        <p:txBody>
+          <a:bodyPr wrap="square" lIns="0" rIns="0" tIns="0" bIns="0" anchor="t">
+            <a:spAutoFit/>
+          </a:bodyPr>
+          <a:lstStyle/>
+          <a:p>
+            <a:pPr>
+              <a:lnSpc>
+                <a:spcPct val="112000"/>
+              </a:lnSpc>
+              <a:spcAft>
+                <a:spcPts val="300"/>
+              </a:spcAft>
+              <a:defRPr sz="1350" b="0">
                 <a:solidFill>
                   <a:srgbClr val="182B43"/>
                 </a:solidFill>
@@ -20046,8 +20046,8 @@
         </p:nvSpPr>
         <p:spPr>
           <a:xfrm>
-            <a:off x="4096512" y="3834993"/>
-            <a:ext cx="7589520" cy="534009"/>
+            <a:off x="4096512" y="3966667"/>
+            <a:ext cx="7589520" cy="501091"/>
           </a:xfrm>
           <a:prstGeom prst="roundRect">
             <a:avLst>
@@ -20091,7 +20091,7 @@
         </p:nvSpPr>
         <p:spPr>
           <a:xfrm>
-            <a:off x="4233672" y="3944721"/>
+            <a:off x="4233672" y="4076395"/>
             <a:ext cx="594360" cy="256032"/>
           </a:xfrm>
           <a:prstGeom prst="rect">
@@ -20133,7 +20133,7 @@
         </p:nvSpPr>
         <p:spPr>
           <a:xfrm>
-            <a:off x="4937760" y="3908145"/>
+            <a:off x="4937760" y="4039819"/>
             <a:ext cx="6537960" cy="219456"/>
           </a:xfrm>
           <a:prstGeom prst="rect">
@@ -20175,28 +20175,28 @@
         </p:nvSpPr>
         <p:spPr>
           <a:xfrm>
-            <a:off x="4937760" y="4145889"/>
-            <a:ext cx="6537960" cy="232257"/>
-          </a:xfrm>
-          <a:prstGeom prst="rect">
-            <a:avLst/>
-          </a:prstGeom>
-          <a:noFill/>
-        </p:spPr>
-        <p:txBody>
-          <a:bodyPr wrap="square" lIns="0" rIns="0" tIns="0" bIns="0" anchor="t">
-            <a:spAutoFit/>
-          </a:bodyPr>
-          <a:lstStyle/>
-          <a:p>
-            <a:pPr>
-              <a:lnSpc>
-                <a:spcPct val="112000"/>
-              </a:lnSpc>
-              <a:spcAft>
-                <a:spcPts val="300"/>
-              </a:spcAft>
-              <a:defRPr sz="1400" b="0">
+            <a:off x="4937760" y="4240987"/>
+            <a:ext cx="6537960" cy="263347"/>
+          </a:xfrm>
+          <a:prstGeom prst="rect">
+            <a:avLst/>
+          </a:prstGeom>
+          <a:noFill/>
+        </p:spPr>
+        <p:txBody>
+          <a:bodyPr wrap="square" lIns="0" rIns="0" tIns="0" bIns="0" anchor="t">
+            <a:spAutoFit/>
+          </a:bodyPr>
+          <a:lstStyle/>
+          <a:p>
+            <a:pPr>
+              <a:lnSpc>
+                <a:spcPct val="112000"/>
+              </a:lnSpc>
+              <a:spcAft>
+                <a:spcPts val="300"/>
+              </a:spcAft>
+              <a:defRPr sz="1350" b="0">
                 <a:solidFill>
                   <a:srgbClr val="182B43"/>
                 </a:solidFill>
@@ -20217,8 +20217,8 @@
         </p:nvSpPr>
         <p:spPr>
           <a:xfrm>
-            <a:off x="4096512" y="4423867"/>
-            <a:ext cx="7589520" cy="534009"/>
+            <a:off x="4096512" y="4522622"/>
+            <a:ext cx="7589520" cy="501091"/>
           </a:xfrm>
           <a:prstGeom prst="roundRect">
             <a:avLst>
@@ -20262,7 +20262,7 @@
         </p:nvSpPr>
         <p:spPr>
           <a:xfrm>
-            <a:off x="4233672" y="4533595"/>
+            <a:off x="4233672" y="4632350"/>
             <a:ext cx="594360" cy="256032"/>
           </a:xfrm>
           <a:prstGeom prst="rect">
@@ -20304,7 +20304,7 @@
         </p:nvSpPr>
         <p:spPr>
           <a:xfrm>
-            <a:off x="4937760" y="4497019"/>
+            <a:off x="4937760" y="4595774"/>
             <a:ext cx="6537960" cy="219456"/>
           </a:xfrm>
           <a:prstGeom prst="rect">
@@ -20346,28 +20346,28 @@
         </p:nvSpPr>
         <p:spPr>
           <a:xfrm>
-            <a:off x="4937760" y="4734763"/>
-            <a:ext cx="6537960" cy="232257"/>
-          </a:xfrm>
-          <a:prstGeom prst="rect">
-            <a:avLst/>
-          </a:prstGeom>
-          <a:noFill/>
-        </p:spPr>
-        <p:txBody>
-          <a:bodyPr wrap="square" lIns="0" rIns="0" tIns="0" bIns="0" anchor="t">
-            <a:spAutoFit/>
-          </a:bodyPr>
-          <a:lstStyle/>
-          <a:p>
-            <a:pPr>
-              <a:lnSpc>
-                <a:spcPct val="112000"/>
-              </a:lnSpc>
-              <a:spcAft>
-                <a:spcPts val="300"/>
-              </a:spcAft>
-              <a:defRPr sz="1400" b="0">
+            <a:off x="4937760" y="4796942"/>
+            <a:ext cx="6537960" cy="263347"/>
+          </a:xfrm>
+          <a:prstGeom prst="rect">
+            <a:avLst/>
+          </a:prstGeom>
+          <a:noFill/>
+        </p:spPr>
+        <p:txBody>
+          <a:bodyPr wrap="square" lIns="0" rIns="0" tIns="0" bIns="0" anchor="t">
+            <a:spAutoFit/>
+          </a:bodyPr>
+          <a:lstStyle/>
+          <a:p>
+            <a:pPr>
+              <a:lnSpc>
+                <a:spcPct val="112000"/>
+              </a:lnSpc>
+              <a:spcAft>
+                <a:spcPts val="300"/>
+              </a:spcAft>
+              <a:defRPr sz="1350" b="0">
                 <a:solidFill>
                   <a:srgbClr val="182B43"/>
                 </a:solidFill>
@@ -20388,8 +20388,8 @@
         </p:nvSpPr>
         <p:spPr>
           <a:xfrm>
-            <a:off x="4096512" y="5012740"/>
-            <a:ext cx="7589520" cy="534009"/>
+            <a:off x="4096512" y="5078577"/>
+            <a:ext cx="7589520" cy="501091"/>
           </a:xfrm>
           <a:prstGeom prst="roundRect">
             <a:avLst>
@@ -20433,7 +20433,7 @@
         </p:nvSpPr>
         <p:spPr>
           <a:xfrm>
-            <a:off x="4233672" y="5122468"/>
+            <a:off x="4233672" y="5188305"/>
             <a:ext cx="594360" cy="256032"/>
           </a:xfrm>
           <a:prstGeom prst="rect">
@@ -20475,7 +20475,7 @@
         </p:nvSpPr>
         <p:spPr>
           <a:xfrm>
-            <a:off x="4937760" y="5085892"/>
+            <a:off x="4937760" y="5151729"/>
             <a:ext cx="6537960" cy="219456"/>
           </a:xfrm>
           <a:prstGeom prst="rect">
@@ -20517,28 +20517,28 @@
         </p:nvSpPr>
         <p:spPr>
           <a:xfrm>
-            <a:off x="4937760" y="5323636"/>
-            <a:ext cx="6537960" cy="232257"/>
-          </a:xfrm>
-          <a:prstGeom prst="rect">
-            <a:avLst/>
-          </a:prstGeom>
-          <a:noFill/>
-        </p:spPr>
-        <p:txBody>
-          <a:bodyPr wrap="square" lIns="0" rIns="0" tIns="0" bIns="0" anchor="t">
-            <a:spAutoFit/>
-          </a:bodyPr>
-          <a:lstStyle/>
-          <a:p>
-            <a:pPr>
-              <a:lnSpc>
-                <a:spcPct val="112000"/>
-              </a:lnSpc>
-              <a:spcAft>
-                <a:spcPts val="300"/>
-              </a:spcAft>
-              <a:defRPr sz="1400" b="0">
+            <a:off x="4937760" y="5352897"/>
+            <a:ext cx="6537960" cy="263347"/>
+          </a:xfrm>
+          <a:prstGeom prst="rect">
+            <a:avLst/>
+          </a:prstGeom>
+          <a:noFill/>
+        </p:spPr>
+        <p:txBody>
+          <a:bodyPr wrap="square" lIns="0" rIns="0" tIns="0" bIns="0" anchor="t">
+            <a:spAutoFit/>
+          </a:bodyPr>
+          <a:lstStyle/>
+          <a:p>
+            <a:pPr>
+              <a:lnSpc>
+                <a:spcPct val="112000"/>
+              </a:lnSpc>
+              <a:spcAft>
+                <a:spcPts val="300"/>
+              </a:spcAft>
+              <a:defRPr sz="1350" b="0">
                 <a:solidFill>
                   <a:srgbClr val="182B43"/>
                 </a:solidFill>
@@ -20559,8 +20559,8 @@
         </p:nvSpPr>
         <p:spPr>
           <a:xfrm>
-            <a:off x="4096512" y="5601614"/>
-            <a:ext cx="7589520" cy="534009"/>
+            <a:off x="4096512" y="5634532"/>
+            <a:ext cx="7589520" cy="501091"/>
           </a:xfrm>
           <a:prstGeom prst="roundRect">
             <a:avLst>
@@ -20604,7 +20604,7 @@
         </p:nvSpPr>
         <p:spPr>
           <a:xfrm>
-            <a:off x="4233672" y="5711342"/>
+            <a:off x="4233672" y="5744260"/>
             <a:ext cx="594360" cy="256032"/>
           </a:xfrm>
           <a:prstGeom prst="rect">
@@ -20646,7 +20646,7 @@
         </p:nvSpPr>
         <p:spPr>
           <a:xfrm>
-            <a:off x="4937760" y="5674766"/>
+            <a:off x="4937760" y="5707684"/>
             <a:ext cx="6537960" cy="219456"/>
           </a:xfrm>
           <a:prstGeom prst="rect">
@@ -20688,8 +20688,8 @@
         </p:nvSpPr>
         <p:spPr>
           <a:xfrm>
-            <a:off x="4937760" y="5912510"/>
-            <a:ext cx="6537960" cy="232257"/>
+            <a:off x="4937760" y="5908852"/>
+            <a:ext cx="6537960" cy="263347"/>
           </a:xfrm>
           <a:prstGeom prst="rect">
             <a:avLst/>

--- a/presentations/aws-security-agent-presentation.pptx
+++ b/presentations/aws-security-agent-presentation.pptx
@@ -41,7 +41,6 @@
     <p:sldId id="289" r:id="rId41"/>
     <p:sldId id="290" r:id="rId42"/>
     <p:sldId id="291" r:id="rId43"/>
-    <p:sldId id="292" r:id="rId44"/>
   </p:sldIdLst>
   <p:sldSz cx="12191695" cy="6858000" type="screen4x3"/>
   <p:notesSz cx="6858000" cy="9144000"/>
@@ -1111,18 +1110,13 @@
           <a:p/>
           <a:p>
             <a:r>
-              <a:t>The IDE integration is an entry point into the service workflow. Review source upload, credentials, permissions and the destination Region before enabling it. A differential scan submitted from a build workflow uses the codebase as context and focuses findings on the supplied changes. Preserve the base and head revisions so the result can be tied to the intended diff. Neither path is a guarantee that every build is automatically gated.</a:t>
+              <a:t>The documented S3 differential-review workflow uses uploaded source and diff context. Record the base and head revisions, approved bucket and role, scan identifier and returned findings. Review the source payload for secrets and unnecessary content before submission. A scan result is not itself authorization to merge or deploy; the promotion rule is a separately proposed team control.</a:t>
             </a:r>
           </a:p>
           <a:p/>
           <a:p>
             <a:r>
               <a:t>Official evidence:</a:t>
-            </a:r>
-          </a:p>
-          <a:p>
-            <a:r>
-              <a:t>S26 — Code review from an IDE: https://docs.aws.amazon.com/securityagent/latest/userguide/code-review-ide-integration.html</a:t>
             </a:r>
           </a:p>
           <a:p>
@@ -3221,7 +3215,7 @@
           </a:p>
           <a:p>
             <a:r>
-              <a:t>S26 — Code review from an IDE: https://docs.aws.amazon.com/securityagent/latest/userguide/code-review-ide-integration.html</a:t>
+              <a:t>S27 — Run a differential code scan with S3: https://docs.aws.amazon.com/securityagent/latest/userguide/run-diff-scan-s3.html</a:t>
             </a:r>
           </a:p>
           <a:p>
@@ -3320,12 +3314,12 @@
           </a:p>
           <a:p>
             <a:r>
-              <a:t>S27 — Run a differential code scan with S3: https://docs.aws.amazon.com/securityagent/latest/userguide/run-diff-scan-s3.html</a:t>
-            </a:r>
-          </a:p>
-          <a:p>
-            <a:r>
-              <a:t>S05 — Pricing and billing: https://docs.aws.amazon.com/securityagent/latest/userguide/pricing.html</a:t>
+              <a:t>S28 — Run penetration tests from CI/CD: https://docs.aws.amazon.com/securityagent/latest/userguide/cicd-pentest.html</a:t>
+            </a:r>
+          </a:p>
+          <a:p>
+            <a:r>
+              <a:t>S29 — GitHub Actions scoped-pentest tutorial: https://docs.aws.amazon.com/securityagent/latest/userguide/sample-cicd-github.html</a:t>
             </a:r>
           </a:p>
         </p:txBody>
@@ -3401,7 +3395,7 @@
           <a:p/>
           <a:p>
             <a:r>
-              <a:t>Reference content only; not part of the timed presentation. Product function and prerequisites come from the cited official documentation. The retention record and independent acceptance procedure are recommended team controls, not asserted native outputs. No live workflow was executed.</a:t>
+              <a:t>This appendix is outside the timed session. All source URLs are listed below and in the relevant slide notes. No live workflow or measured benefit is claimed.</a:t>
             </a:r>
           </a:p>
           <a:p/>
@@ -3410,105 +3404,6 @@
               <a:t>Official evidence:</a:t>
             </a:r>
           </a:p>
-          <a:p/>
-          <a:p/>
-          <a:p>
-            <a:r>
-              <a:t>Capability evidence:</a:t>
-            </a:r>
-          </a:p>
-          <a:p>
-            <a:r>
-              <a:t>S28 — Run penetration tests from CI/CD: https://docs.aws.amazon.com/securityagent/latest/userguide/cicd-pentest.html</a:t>
-            </a:r>
-          </a:p>
-          <a:p>
-            <a:r>
-              <a:t>S29 — GitHub Actions scoped-pentest tutorial: https://docs.aws.amazon.com/securityagent/latest/userguide/sample-cicd-github.html</a:t>
-            </a:r>
-          </a:p>
-        </p:txBody>
-      </p:sp>
-      <p:sp>
-        <p:nvSpPr>
-          <p:cNvPr id="4" name="Slide Number Placeholder 3"/>
-          <p:cNvSpPr>
-            <a:spLocks noGrp="1"/>
-          </p:cNvSpPr>
-          <p:nvPr>
-            <p:ph type="sldNum" idx="5" sz="quarter"/>
-          </p:nvPr>
-        </p:nvSpPr>
-        <p:spPr/>
-      </p:sp>
-    </p:spTree>
-  </p:cSld>
-  <p:clrMapOvr>
-    <a:masterClrMapping/>
-  </p:clrMapOvr>
-</p:notes>
-</file>
-
-<file path=ppt/notesSlides/notesSlide37.xml><?xml version="1.0" encoding="utf-8"?>
-<p:notes xmlns:a="http://schemas.openxmlformats.org/drawingml/2006/main" xmlns:p="http://schemas.openxmlformats.org/presentationml/2006/main" xmlns:r="http://schemas.openxmlformats.org/officeDocument/2006/relationships">
-  <p:cSld>
-    <p:spTree>
-      <p:nvGrpSpPr>
-        <p:cNvPr id="1" name=""/>
-        <p:cNvGrpSpPr/>
-        <p:nvPr/>
-      </p:nvGrpSpPr>
-      <p:grpSpPr>
-        <a:xfrm>
-          <a:off x="0" y="0"/>
-          <a:ext cx="0" cy="0"/>
-          <a:chOff x="0" y="0"/>
-          <a:chExt cx="0" cy="0"/>
-        </a:xfrm>
-      </p:grpSpPr>
-      <p:sp>
-        <p:nvSpPr>
-          <p:cNvPr id="2" name="Slide Image Placeholder 1"/>
-          <p:cNvSpPr>
-            <a:spLocks noGrp="1"/>
-          </p:cNvSpPr>
-          <p:nvPr>
-            <p:ph type="sldImg" idx="2"/>
-          </p:nvPr>
-        </p:nvSpPr>
-        <p:spPr/>
-      </p:sp>
-      <p:sp>
-        <p:nvSpPr>
-          <p:cNvPr id="3" name="Notes Placeholder 2"/>
-          <p:cNvSpPr>
-            <a:spLocks noGrp="1"/>
-          </p:cNvSpPr>
-          <p:nvPr>
-            <p:ph type="body" idx="3" sz="quarter"/>
-          </p:nvPr>
-        </p:nvSpPr>
-        <p:spPr/>
-        <p:txBody>
-          <a:bodyPr/>
-          <a:lstStyle/>
-          <a:p>
-            <a:r>
-              <a:t>Timing: 30:00–30:00; allocated 00:00.</a:t>
-            </a:r>
-          </a:p>
-          <a:p/>
-          <a:p>
-            <a:r>
-              <a:t>This appendix is outside the timed session. All source URLs are listed below and in the relevant slide notes. No live workflow or measured benefit is claimed.</a:t>
-            </a:r>
-          </a:p>
-          <a:p/>
-          <a:p>
-            <a:r>
-              <a:t>Official evidence:</a:t>
-            </a:r>
-          </a:p>
           <a:p>
             <a:r>
               <a:t>S03 — On-demand penetration testing generally available: https://aws.amazon.com/about-aws/whats-new/2026/03/aws-security-agent-ondemand-penetration/</a:t>
@@ -3582,11 +3477,6 @@
           <a:p>
             <a:r>
               <a:t>S25 — Remediate code-review findings: https://docs.aws.amazon.com/securityagent/latest/userguide/remediate-code-scan-findings.html</a:t>
-            </a:r>
-          </a:p>
-          <a:p>
-            <a:r>
-              <a:t>S26 — Code review from an IDE: https://docs.aws.amazon.com/securityagent/latest/userguide/code-review-ide-integration.html</a:t>
             </a:r>
           </a:p>
           <a:p>
@@ -12769,7 +12659,7 @@
               </a:defRPr>
             </a:pPr>
             <a:r>
-              <a:t>IDE and build workflows still call a service</a:t>
+              <a:t>Submit and verify a differential source review</a:t>
             </a:r>
           </a:p>
         </p:txBody>
@@ -12811,7 +12701,7 @@
               </a:defRPr>
             </a:pPr>
             <a:r>
-              <a:t>A local entry point does not make the assessment a local-only operation.</a:t>
+              <a:t>A build submission calls a service; retain the source revision and scan evidence.</a:t>
             </a:r>
           </a:p>
         </p:txBody>
@@ -12980,7 +12870,7 @@
               </a:defRPr>
             </a:pPr>
             <a:r>
-              <a:t>Official source IDs: S26, S27</a:t>
+              <a:t>Official source IDs: S27</a:t>
             </a:r>
           </a:p>
         </p:txBody>
@@ -13111,7 +13001,7 @@
               </a:defRPr>
             </a:pPr>
             <a:r>
-              <a:t>IDE access</a:t>
+              <a:t>Prepare source context</a:t>
             </a:r>
           </a:p>
         </p:txBody>
@@ -13153,7 +13043,7 @@
               </a:defRPr>
             </a:pPr>
             <a:r>
-              <a:t>Use the documented MCP or Kiro integration to submit work with the required service setup and source context.</a:t>
+              <a:t>Prepare the supported source and diff artifacts; retain base and head revisions and check the payload before upload.</a:t>
             </a:r>
           </a:p>
         </p:txBody>
@@ -13284,7 +13174,7 @@
               </a:defRPr>
             </a:pPr>
             <a:r>
-              <a:t>Differential build scan</a:t>
+              <a:t>Submit and inspect findings</a:t>
             </a:r>
           </a:p>
         </p:txBody>
@@ -13326,7 +13216,7 @@
               </a:defRPr>
             </a:pPr>
             <a:r>
-              <a:t>Upload the supported source/diff artifacts and submit the documented API/SDK workflow.</a:t>
+              <a:t>Use the documented S3/API workflow. Retain the scan result and determine which findings apply to the proposed change.</a:t>
             </a:r>
           </a:p>
         </p:txBody>
@@ -13405,7 +13295,7 @@
               <a:spcAft>
                 <a:spcPts val="300"/>
               </a:spcAft>
-              <a:defRPr sz="1450" b="1">
+              <a:defRPr sz="1400" b="1">
                 <a:solidFill>
                   <a:srgbClr val="FFFFFF"/>
                 </a:solidFill>
@@ -13413,7 +13303,7 @@
               </a:defRPr>
             </a:pPr>
             <a:r>
-              <a:t>Acceptance: confirm what left the workstation or runner, which revision was scanned, and what checks actually ran.</a:t>
+              <a:t>Acceptance: confirm the uploaded scope, analyzed revisions and finding disposition before applying a team-owned release rule.</a:t>
             </a:r>
           </a:p>
         </p:txBody>
@@ -33670,7 +33560,7 @@
               <a:spcAft>
                 <a:spcPts val="300"/>
               </a:spcAft>
-              <a:defRPr sz="3100" b="1">
+              <a:defRPr sz="2650" b="1">
                 <a:solidFill>
                   <a:srgbClr val="182B43"/>
                 </a:solidFill>
@@ -33678,7 +33568,7 @@
               </a:defRPr>
             </a:pPr>
             <a:r>
-              <a:t>C16 · Start a code review from the developer’s IDE</a:t>
+              <a:t>C17 · Submit a differential source review from a build workflow</a:t>
             </a:r>
           </a:p>
         </p:txBody>
@@ -33720,7 +33610,7 @@
               </a:defRPr>
             </a:pPr>
             <a:r>
-              <a:t>Preview · MCP or Kiro Power integration · Configured client integration with cloud scan</a:t>
+              <a:t>Preview · S3/API code-review path · Native API; pipeline wiring is team-owned</a:t>
             </a:r>
           </a:p>
         </p:txBody>
@@ -33978,7 +33868,7 @@
               </a:defRPr>
             </a:pPr>
             <a:r>
-              <a:t>The IDE integration packages source for a service-backed code review and returns findings through the configured client.</a:t>
+              <a:t>The documented API path accepts full source context in S3 together with a unified diff to focus a review on changed code.</a:t>
             </a:r>
           </a:p>
         </p:txBody>
@@ -34109,7 +33999,7 @@
               </a:defRPr>
             </a:pPr>
             <a:r>
-              <a:t>Install the supported integration, review first-use provisioning permissions, and approve the code/data handling boundary.</a:t>
+              <a:t>Prepare approved S3 inputs and invoke the documented code-review job API from a suitably scoped build identity.</a:t>
             </a:r>
           </a:p>
         </p:txBody>
@@ -34240,7 +34130,7 @@
               </a:defRPr>
             </a:pPr>
             <a:r>
-              <a:t>IDE-submitted review task and code findings linked to the reviewed revision.</a:t>
+              <a:t>Build-submitted differential review record with full source baseline and unified diff.</a:t>
             </a:r>
           </a:p>
         </p:txBody>
@@ -34371,7 +34261,7 @@
               </a:defRPr>
             </a:pPr>
             <a:r>
-              <a:t>Check upload contents, resource ownership, retention settings, and returned scan revision before accepting the result.</a:t>
+              <a:t>Validate source/diff consistency and handle failed or skipped jobs distinctly from a clean review.</a:t>
             </a:r>
           </a:p>
         </p:txBody>
@@ -34502,7 +34392,7 @@
               </a:defRPr>
             </a:pPr>
             <a:r>
-              <a:t>This is not an offline local-only scan: source is uploaded to S3. Initial setup can provision an Agent Space, role, and bucket and requires corresponding IAM permissions.</a:t>
+              <a:t>It is not automatic discovery of your CI provider. The team must supply the correct source snapshot, diff base, permissions, and job handling.</a:t>
             </a:r>
           </a:p>
         </p:txBody>
@@ -34544,7 +34434,7 @@
               </a:defRPr>
             </a:pPr>
             <a:r>
-              <a:t>Official source IDs: S26, S05</a:t>
+              <a:t>Official source IDs: S27, S05</a:t>
             </a:r>
           </a:p>
         </p:txBody>
@@ -34689,7 +34579,7 @@
               <a:spcAft>
                 <a:spcPts val="300"/>
               </a:spcAft>
-              <a:defRPr sz="2650" b="1">
+              <a:defRPr sz="2850" b="1">
                 <a:solidFill>
                   <a:srgbClr val="182B43"/>
                 </a:solidFill>
@@ -34697,7 +34587,7 @@
               </a:defRPr>
             </a:pPr>
             <a:r>
-              <a:t>C17 · Submit a differential source review from a build workflow</a:t>
+              <a:t>C18 · Gate promotion using a scoped post-deployment pentest</a:t>
             </a:r>
           </a:p>
         </p:txBody>
@@ -34731,7 +34621,7 @@
               <a:spcAft>
                 <a:spcPts val="300"/>
               </a:spcAft>
-              <a:defRPr sz="1800" b="0">
+              <a:defRPr sz="1700" b="0">
                 <a:solidFill>
                   <a:srgbClr val="55657A"/>
                 </a:solidFill>
@@ -34739,7 +34629,7 @@
               </a:defRPr>
             </a:pPr>
             <a:r>
-              <a:t>Preview · S3/API code-review path · Native API; pipeline wiring is team-owned</a:t>
+              <a:t>Public preview · CI/CD pipeline integration · Native service job; configured pipeline integration</a:t>
             </a:r>
           </a:p>
         </p:txBody>
@@ -34997,7 +34887,7 @@
               </a:defRPr>
             </a:pPr>
             <a:r>
-              <a:t>The documented API path accepts full source context in S3 together with a unified diff to focus a review on changed code.</a:t>
+              <a:t>The documented integration tests a deployed change and can gate subsequent promotion using scoped findings and thresholds.</a:t>
             </a:r>
           </a:p>
         </p:txBody>
@@ -35120,7 +35010,7 @@
               <a:spcAft>
                 <a:spcPts val="300"/>
               </a:spcAft>
-              <a:defRPr sz="1700" b="0">
+              <a:defRPr sz="1500" b="0">
                 <a:solidFill>
                   <a:srgbClr val="182B43"/>
                 </a:solidFill>
@@ -35128,7 +35018,7 @@
               </a:defRPr>
             </a:pPr>
             <a:r>
-              <a:t>Prepare approved S3 inputs and invoke the documented code-review job API from a suitably scoped build identity.</a:t>
+              <a:t>Configure a staging target, existing test setup, trusted OIDC role, diff baseline, thresholds, and explicit untested/error handling; begin with a dry run.</a:t>
             </a:r>
           </a:p>
         </p:txBody>
@@ -35259,7 +35149,7 @@
               </a:defRPr>
             </a:pPr>
             <a:r>
-              <a:t>Build-submitted differential review record with full source baseline and unified diff.</a:t>
+              <a:t>Post-deployment assessment result and separately recorded promotion decision.</a:t>
             </a:r>
           </a:p>
         </p:txBody>
@@ -35390,7 +35280,7 @@
               </a:defRPr>
             </a:pPr>
             <a:r>
-              <a:t>Validate source/diff consistency and handle failed or skipped jobs distinctly from a clean review.</a:t>
+              <a:t>Validate every gate outcome and cancellation path. A passing pipeline must not be represented as a complete application assessment.</a:t>
             </a:r>
           </a:p>
         </p:txBody>
@@ -35521,7 +35411,7 @@
               </a:defRPr>
             </a:pPr>
             <a:r>
-              <a:t>It is not automatic discovery of your CI provider. The team must supply the correct source snapshot, diff base, permissions, and job handling.</a:t>
+              <a:t>It is not a pre-merge static check. Scoped-out changes can pass without dynamic testing; cancellation of the runner can leave a server-side job running.</a:t>
             </a:r>
           </a:p>
         </p:txBody>
@@ -35563,7 +35453,7 @@
               </a:defRPr>
             </a:pPr>
             <a:r>
-              <a:t>Official source IDs: S27, S05</a:t>
+              <a:t>Official source IDs: S28, S29</a:t>
             </a:r>
           </a:p>
         </p:txBody>
@@ -35577,1025 +35467,6 @@
 </file>
 
 <file path=ppt/slides/slide36.xml><?xml version="1.0" encoding="utf-8"?>
-<p:sld xmlns:a="http://schemas.openxmlformats.org/drawingml/2006/main" xmlns:p="http://schemas.openxmlformats.org/presentationml/2006/main" xmlns:r="http://schemas.openxmlformats.org/officeDocument/2006/relationships">
-  <p:cSld>
-    <p:bg>
-      <p:bgPr>
-        <a:solidFill>
-          <a:srgbClr val="FFFFFF"/>
-        </a:solidFill>
-        <a:effectLst/>
-      </p:bgPr>
-    </p:bg>
-    <p:spTree>
-      <p:nvGrpSpPr>
-        <p:cNvPr id="1" name=""/>
-        <p:cNvGrpSpPr/>
-        <p:nvPr/>
-      </p:nvGrpSpPr>
-      <p:grpSpPr/>
-      <p:sp>
-        <p:nvSpPr>
-          <p:cNvPr id="2" name="Rectangle 1"/>
-          <p:cNvSpPr/>
-          <p:nvPr/>
-        </p:nvSpPr>
-        <p:spPr>
-          <a:xfrm>
-            <a:off x="0" y="0"/>
-            <a:ext cx="12191695" cy="109728"/>
-          </a:xfrm>
-          <a:prstGeom prst="rect">
-            <a:avLst/>
-          </a:prstGeom>
-          <a:solidFill>
-            <a:srgbClr val="167259"/>
-          </a:solidFill>
-          <a:ln>
-            <a:noFill/>
-          </a:ln>
-        </p:spPr>
-        <p:style>
-          <a:lnRef idx="1">
-            <a:schemeClr val="accent1"/>
-          </a:lnRef>
-          <a:fillRef idx="3">
-            <a:schemeClr val="accent1"/>
-          </a:fillRef>
-          <a:effectRef idx="2">
-            <a:schemeClr val="accent1"/>
-          </a:effectRef>
-          <a:fontRef idx="minor">
-            <a:schemeClr val="lt1"/>
-          </a:fontRef>
-        </p:style>
-        <p:txBody>
-          <a:bodyPr rtlCol="0" anchor="ctr"/>
-          <a:lstStyle/>
-          <a:p>
-            <a:pPr algn="ctr"/>
-          </a:p>
-        </p:txBody>
-      </p:sp>
-      <p:sp>
-        <p:nvSpPr>
-          <p:cNvPr id="3" name="TextBox 2"/>
-          <p:cNvSpPr txBox="1"/>
-          <p:nvPr/>
-        </p:nvSpPr>
-        <p:spPr>
-          <a:xfrm>
-            <a:off x="502920" y="310896"/>
-            <a:ext cx="10881360" cy="228600"/>
-          </a:xfrm>
-          <a:prstGeom prst="rect">
-            <a:avLst/>
-          </a:prstGeom>
-          <a:noFill/>
-        </p:spPr>
-        <p:txBody>
-          <a:bodyPr wrap="square" lIns="0" rIns="0" tIns="0" bIns="0" anchor="t">
-            <a:spAutoFit/>
-          </a:bodyPr>
-          <a:lstStyle/>
-          <a:p>
-            <a:pPr>
-              <a:lnSpc>
-                <a:spcPct val="112000"/>
-              </a:lnSpc>
-              <a:spcAft>
-                <a:spcPts val="300"/>
-              </a:spcAft>
-              <a:defRPr sz="1050" b="1">
-                <a:solidFill>
-                  <a:srgbClr val="167259"/>
-                </a:solidFill>
-                <a:latin typeface="Arial"/>
-              </a:defRPr>
-            </a:pPr>
-            <a:r>
-              <a:t>AWS SECURITY AGENT  /  UNTIMED APPENDIX</a:t>
-            </a:r>
-          </a:p>
-        </p:txBody>
-      </p:sp>
-      <p:sp>
-        <p:nvSpPr>
-          <p:cNvPr id="4" name="TextBox 3"/>
-          <p:cNvSpPr txBox="1"/>
-          <p:nvPr/>
-        </p:nvSpPr>
-        <p:spPr>
-          <a:xfrm>
-            <a:off x="502920" y="777240"/>
-            <a:ext cx="11018520" cy="804672"/>
-          </a:xfrm>
-          <a:prstGeom prst="rect">
-            <a:avLst/>
-          </a:prstGeom>
-          <a:noFill/>
-        </p:spPr>
-        <p:txBody>
-          <a:bodyPr wrap="square" lIns="0" rIns="0" tIns="0" bIns="0" anchor="t">
-            <a:spAutoFit/>
-          </a:bodyPr>
-          <a:lstStyle/>
-          <a:p>
-            <a:pPr>
-              <a:lnSpc>
-                <a:spcPct val="112000"/>
-              </a:lnSpc>
-              <a:spcAft>
-                <a:spcPts val="300"/>
-              </a:spcAft>
-              <a:defRPr sz="2850" b="1">
-                <a:solidFill>
-                  <a:srgbClr val="182B43"/>
-                </a:solidFill>
-                <a:latin typeface="Arial"/>
-              </a:defRPr>
-            </a:pPr>
-            <a:r>
-              <a:t>C18 · Gate promotion using a scoped post-deployment pentest</a:t>
-            </a:r>
-          </a:p>
-        </p:txBody>
-      </p:sp>
-      <p:sp>
-        <p:nvSpPr>
-          <p:cNvPr id="5" name="TextBox 4"/>
-          <p:cNvSpPr txBox="1"/>
-          <p:nvPr/>
-        </p:nvSpPr>
-        <p:spPr>
-          <a:xfrm>
-            <a:off x="502920" y="1627632"/>
-            <a:ext cx="11018520" cy="502920"/>
-          </a:xfrm>
-          <a:prstGeom prst="rect">
-            <a:avLst/>
-          </a:prstGeom>
-          <a:noFill/>
-        </p:spPr>
-        <p:txBody>
-          <a:bodyPr wrap="square" lIns="0" rIns="0" tIns="0" bIns="0" anchor="t">
-            <a:spAutoFit/>
-          </a:bodyPr>
-          <a:lstStyle/>
-          <a:p>
-            <a:pPr>
-              <a:lnSpc>
-                <a:spcPct val="112000"/>
-              </a:lnSpc>
-              <a:spcAft>
-                <a:spcPts val="300"/>
-              </a:spcAft>
-              <a:defRPr sz="1700" b="0">
-                <a:solidFill>
-                  <a:srgbClr val="55657A"/>
-                </a:solidFill>
-                <a:latin typeface="Arial"/>
-              </a:defRPr>
-            </a:pPr>
-            <a:r>
-              <a:t>Public preview · CI/CD pipeline integration · Native service job; configured pipeline integration</a:t>
-            </a:r>
-          </a:p>
-        </p:txBody>
-      </p:sp>
-      <p:sp>
-        <p:nvSpPr>
-          <p:cNvPr id="6" name="Rectangle 5"/>
-          <p:cNvSpPr/>
-          <p:nvPr/>
-        </p:nvSpPr>
-        <p:spPr>
-          <a:xfrm>
-            <a:off x="502920" y="6391656"/>
-            <a:ext cx="11183112" cy="9144"/>
-          </a:xfrm>
-          <a:prstGeom prst="rect">
-            <a:avLst/>
-          </a:prstGeom>
-          <a:solidFill>
-            <a:srgbClr val="DBE2E9"/>
-          </a:solidFill>
-          <a:ln>
-            <a:noFill/>
-          </a:ln>
-        </p:spPr>
-        <p:style>
-          <a:lnRef idx="1">
-            <a:schemeClr val="accent1"/>
-          </a:lnRef>
-          <a:fillRef idx="3">
-            <a:schemeClr val="accent1"/>
-          </a:fillRef>
-          <a:effectRef idx="2">
-            <a:schemeClr val="accent1"/>
-          </a:effectRef>
-          <a:fontRef idx="minor">
-            <a:schemeClr val="lt1"/>
-          </a:fontRef>
-        </p:style>
-        <p:txBody>
-          <a:bodyPr rtlCol="0" anchor="ctr"/>
-          <a:lstStyle/>
-          <a:p>
-            <a:pPr algn="ctr"/>
-          </a:p>
-        </p:txBody>
-      </p:sp>
-      <p:sp>
-        <p:nvSpPr>
-          <p:cNvPr id="7" name="TextBox 6"/>
-          <p:cNvSpPr txBox="1"/>
-          <p:nvPr/>
-        </p:nvSpPr>
-        <p:spPr>
-          <a:xfrm>
-            <a:off x="502920" y="6510528"/>
-            <a:ext cx="5760720" cy="201168"/>
-          </a:xfrm>
-          <a:prstGeom prst="rect">
-            <a:avLst/>
-          </a:prstGeom>
-          <a:noFill/>
-        </p:spPr>
-        <p:txBody>
-          <a:bodyPr wrap="square" lIns="0" rIns="0" tIns="0" bIns="0" anchor="t">
-            <a:spAutoFit/>
-          </a:bodyPr>
-          <a:lstStyle/>
-          <a:p>
-            <a:pPr>
-              <a:lnSpc>
-                <a:spcPct val="112000"/>
-              </a:lnSpc>
-              <a:spcAft>
-                <a:spcPts val="300"/>
-              </a:spcAft>
-              <a:defRPr sz="1050" b="0">
-                <a:solidFill>
-                  <a:srgbClr val="55657A"/>
-                </a:solidFill>
-                <a:latin typeface="Arial"/>
-              </a:defRPr>
-            </a:pPr>
-            <a:r>
-              <a:t>UNTIMED APPENDIX    AWS Security Agent</a:t>
-            </a:r>
-          </a:p>
-        </p:txBody>
-      </p:sp>
-      <p:sp>
-        <p:nvSpPr>
-          <p:cNvPr id="8" name="TextBox 7"/>
-          <p:cNvSpPr txBox="1"/>
-          <p:nvPr/>
-        </p:nvSpPr>
-        <p:spPr>
-          <a:xfrm>
-            <a:off x="7589520" y="6510528"/>
-            <a:ext cx="4114800" cy="201168"/>
-          </a:xfrm>
-          <a:prstGeom prst="rect">
-            <a:avLst/>
-          </a:prstGeom>
-          <a:noFill/>
-        </p:spPr>
-        <p:txBody>
-          <a:bodyPr wrap="square" lIns="0" rIns="0" tIns="0" bIns="0" anchor="t">
-            <a:spAutoFit/>
-          </a:bodyPr>
-          <a:lstStyle/>
-          <a:p>
-            <a:pPr>
-              <a:lnSpc>
-                <a:spcPct val="112000"/>
-              </a:lnSpc>
-              <a:spcAft>
-                <a:spcPts val="300"/>
-              </a:spcAft>
-              <a:defRPr sz="1050" b="0">
-                <a:solidFill>
-                  <a:srgbClr val="55657A"/>
-                </a:solidFill>
-                <a:latin typeface="Arial"/>
-              </a:defRPr>
-            </a:pPr>
-            <a:r>
-              <a:t>Outside the timed session</a:t>
-            </a:r>
-          </a:p>
-        </p:txBody>
-      </p:sp>
-      <p:sp>
-        <p:nvSpPr>
-          <p:cNvPr id="9" name="Rounded Rectangle 8"/>
-          <p:cNvSpPr/>
-          <p:nvPr/>
-        </p:nvSpPr>
-        <p:spPr>
-          <a:xfrm>
-            <a:off x="502920" y="2286000"/>
-            <a:ext cx="3611880" cy="1856231"/>
-          </a:xfrm>
-          <a:prstGeom prst="roundRect">
-            <a:avLst>
-              <a:gd name="adj" fmla="val 8000"/>
-            </a:avLst>
-          </a:prstGeom>
-          <a:solidFill>
-            <a:srgbClr val="F1F5F8"/>
-          </a:solidFill>
-          <a:ln w="10160">
-            <a:solidFill>
-              <a:srgbClr val="DBE2E9"/>
-            </a:solidFill>
-          </a:ln>
-        </p:spPr>
-        <p:style>
-          <a:lnRef idx="1">
-            <a:schemeClr val="accent1"/>
-          </a:lnRef>
-          <a:fillRef idx="3">
-            <a:schemeClr val="accent1"/>
-          </a:fillRef>
-          <a:effectRef idx="2">
-            <a:schemeClr val="accent1"/>
-          </a:effectRef>
-          <a:fontRef idx="minor">
-            <a:schemeClr val="lt1"/>
-          </a:fontRef>
-        </p:style>
-        <p:txBody>
-          <a:bodyPr rtlCol="0" anchor="ctr"/>
-          <a:lstStyle/>
-          <a:p>
-            <a:pPr algn="ctr"/>
-          </a:p>
-        </p:txBody>
-      </p:sp>
-      <p:sp>
-        <p:nvSpPr>
-          <p:cNvPr id="10" name="TextBox 9"/>
-          <p:cNvSpPr txBox="1"/>
-          <p:nvPr/>
-        </p:nvSpPr>
-        <p:spPr>
-          <a:xfrm>
-            <a:off x="658368" y="2432304"/>
-            <a:ext cx="3291840" cy="256032"/>
-          </a:xfrm>
-          <a:prstGeom prst="rect">
-            <a:avLst/>
-          </a:prstGeom>
-          <a:noFill/>
-        </p:spPr>
-        <p:txBody>
-          <a:bodyPr wrap="square" lIns="0" rIns="0" tIns="0" bIns="0" anchor="t">
-            <a:spAutoFit/>
-          </a:bodyPr>
-          <a:lstStyle/>
-          <a:p>
-            <a:pPr>
-              <a:lnSpc>
-                <a:spcPct val="112000"/>
-              </a:lnSpc>
-              <a:spcAft>
-                <a:spcPts val="300"/>
-              </a:spcAft>
-              <a:defRPr sz="1050" b="1">
-                <a:solidFill>
-                  <a:srgbClr val="167259"/>
-                </a:solidFill>
-                <a:latin typeface="Arial"/>
-              </a:defRPr>
-            </a:pPr>
-            <a:r>
-              <a:t>DOCUMENTED FUNCTION</a:t>
-            </a:r>
-          </a:p>
-        </p:txBody>
-      </p:sp>
-      <p:sp>
-        <p:nvSpPr>
-          <p:cNvPr id="11" name="TextBox 10"/>
-          <p:cNvSpPr txBox="1"/>
-          <p:nvPr/>
-        </p:nvSpPr>
-        <p:spPr>
-          <a:xfrm>
-            <a:off x="658368" y="2779776"/>
-            <a:ext cx="3273552" cy="1316736"/>
-          </a:xfrm>
-          <a:prstGeom prst="rect">
-            <a:avLst/>
-          </a:prstGeom>
-          <a:noFill/>
-        </p:spPr>
-        <p:txBody>
-          <a:bodyPr wrap="square" lIns="0" rIns="0" tIns="0" bIns="0" anchor="t">
-            <a:spAutoFit/>
-          </a:bodyPr>
-          <a:lstStyle/>
-          <a:p>
-            <a:pPr>
-              <a:lnSpc>
-                <a:spcPct val="112000"/>
-              </a:lnSpc>
-              <a:spcAft>
-                <a:spcPts val="300"/>
-              </a:spcAft>
-              <a:defRPr sz="1700" b="0">
-                <a:solidFill>
-                  <a:srgbClr val="182B43"/>
-                </a:solidFill>
-                <a:latin typeface="Arial"/>
-              </a:defRPr>
-            </a:pPr>
-            <a:r>
-              <a:t>The documented integration tests a deployed change and can gate subsequent promotion using scoped findings and thresholds.</a:t>
-            </a:r>
-          </a:p>
-        </p:txBody>
-      </p:sp>
-      <p:sp>
-        <p:nvSpPr>
-          <p:cNvPr id="12" name="Rounded Rectangle 11"/>
-          <p:cNvSpPr/>
-          <p:nvPr/>
-        </p:nvSpPr>
-        <p:spPr>
-          <a:xfrm>
-            <a:off x="4288536" y="2286000"/>
-            <a:ext cx="3611880" cy="1856231"/>
-          </a:xfrm>
-          <a:prstGeom prst="roundRect">
-            <a:avLst>
-              <a:gd name="adj" fmla="val 8000"/>
-            </a:avLst>
-          </a:prstGeom>
-          <a:solidFill>
-            <a:srgbClr val="F1F5F8"/>
-          </a:solidFill>
-          <a:ln w="10160">
-            <a:solidFill>
-              <a:srgbClr val="DBE2E9"/>
-            </a:solidFill>
-          </a:ln>
-        </p:spPr>
-        <p:style>
-          <a:lnRef idx="1">
-            <a:schemeClr val="accent1"/>
-          </a:lnRef>
-          <a:fillRef idx="3">
-            <a:schemeClr val="accent1"/>
-          </a:fillRef>
-          <a:effectRef idx="2">
-            <a:schemeClr val="accent1"/>
-          </a:effectRef>
-          <a:fontRef idx="minor">
-            <a:schemeClr val="lt1"/>
-          </a:fontRef>
-        </p:style>
-        <p:txBody>
-          <a:bodyPr rtlCol="0" anchor="ctr"/>
-          <a:lstStyle/>
-          <a:p>
-            <a:pPr algn="ctr"/>
-          </a:p>
-        </p:txBody>
-      </p:sp>
-      <p:sp>
-        <p:nvSpPr>
-          <p:cNvPr id="13" name="TextBox 12"/>
-          <p:cNvSpPr txBox="1"/>
-          <p:nvPr/>
-        </p:nvSpPr>
-        <p:spPr>
-          <a:xfrm>
-            <a:off x="4443983" y="2432304"/>
-            <a:ext cx="3291840" cy="256032"/>
-          </a:xfrm>
-          <a:prstGeom prst="rect">
-            <a:avLst/>
-          </a:prstGeom>
-          <a:noFill/>
-        </p:spPr>
-        <p:txBody>
-          <a:bodyPr wrap="square" lIns="0" rIns="0" tIns="0" bIns="0" anchor="t">
-            <a:spAutoFit/>
-          </a:bodyPr>
-          <a:lstStyle/>
-          <a:p>
-            <a:pPr>
-              <a:lnSpc>
-                <a:spcPct val="112000"/>
-              </a:lnSpc>
-              <a:spcAft>
-                <a:spcPts val="300"/>
-              </a:spcAft>
-              <a:defRPr sz="1050" b="1">
-                <a:solidFill>
-                  <a:srgbClr val="167259"/>
-                </a:solidFill>
-                <a:latin typeface="Arial"/>
-              </a:defRPr>
-            </a:pPr>
-            <a:r>
-              <a:t>INVOCATION &amp; SCOPE</a:t>
-            </a:r>
-          </a:p>
-        </p:txBody>
-      </p:sp>
-      <p:sp>
-        <p:nvSpPr>
-          <p:cNvPr id="14" name="TextBox 13"/>
-          <p:cNvSpPr txBox="1"/>
-          <p:nvPr/>
-        </p:nvSpPr>
-        <p:spPr>
-          <a:xfrm>
-            <a:off x="4443983" y="2779776"/>
-            <a:ext cx="3273552" cy="1316736"/>
-          </a:xfrm>
-          <a:prstGeom prst="rect">
-            <a:avLst/>
-          </a:prstGeom>
-          <a:noFill/>
-        </p:spPr>
-        <p:txBody>
-          <a:bodyPr wrap="square" lIns="0" rIns="0" tIns="0" bIns="0" anchor="t">
-            <a:spAutoFit/>
-          </a:bodyPr>
-          <a:lstStyle/>
-          <a:p>
-            <a:pPr>
-              <a:lnSpc>
-                <a:spcPct val="112000"/>
-              </a:lnSpc>
-              <a:spcAft>
-                <a:spcPts val="300"/>
-              </a:spcAft>
-              <a:defRPr sz="1500" b="0">
-                <a:solidFill>
-                  <a:srgbClr val="182B43"/>
-                </a:solidFill>
-                <a:latin typeface="Arial"/>
-              </a:defRPr>
-            </a:pPr>
-            <a:r>
-              <a:t>Configure a staging target, existing test setup, trusted OIDC role, diff baseline, thresholds, and explicit untested/error handling; begin with a dry run.</a:t>
-            </a:r>
-          </a:p>
-        </p:txBody>
-      </p:sp>
-      <p:sp>
-        <p:nvSpPr>
-          <p:cNvPr id="15" name="Rounded Rectangle 14"/>
-          <p:cNvSpPr/>
-          <p:nvPr/>
-        </p:nvSpPr>
-        <p:spPr>
-          <a:xfrm>
-            <a:off x="8074152" y="2286000"/>
-            <a:ext cx="3611880" cy="1856231"/>
-          </a:xfrm>
-          <a:prstGeom prst="roundRect">
-            <a:avLst>
-              <a:gd name="adj" fmla="val 8000"/>
-            </a:avLst>
-          </a:prstGeom>
-          <a:solidFill>
-            <a:srgbClr val="F1F5F8"/>
-          </a:solidFill>
-          <a:ln w="10160">
-            <a:solidFill>
-              <a:srgbClr val="DBE2E9"/>
-            </a:solidFill>
-          </a:ln>
-        </p:spPr>
-        <p:style>
-          <a:lnRef idx="1">
-            <a:schemeClr val="accent1"/>
-          </a:lnRef>
-          <a:fillRef idx="3">
-            <a:schemeClr val="accent1"/>
-          </a:fillRef>
-          <a:effectRef idx="2">
-            <a:schemeClr val="accent1"/>
-          </a:effectRef>
-          <a:fontRef idx="minor">
-            <a:schemeClr val="lt1"/>
-          </a:fontRef>
-        </p:style>
-        <p:txBody>
-          <a:bodyPr rtlCol="0" anchor="ctr"/>
-          <a:lstStyle/>
-          <a:p>
-            <a:pPr algn="ctr"/>
-          </a:p>
-        </p:txBody>
-      </p:sp>
-      <p:sp>
-        <p:nvSpPr>
-          <p:cNvPr id="16" name="TextBox 15"/>
-          <p:cNvSpPr txBox="1"/>
-          <p:nvPr/>
-        </p:nvSpPr>
-        <p:spPr>
-          <a:xfrm>
-            <a:off x="8229600" y="2432304"/>
-            <a:ext cx="3291840" cy="256032"/>
-          </a:xfrm>
-          <a:prstGeom prst="rect">
-            <a:avLst/>
-          </a:prstGeom>
-          <a:noFill/>
-        </p:spPr>
-        <p:txBody>
-          <a:bodyPr wrap="square" lIns="0" rIns="0" tIns="0" bIns="0" anchor="t">
-            <a:spAutoFit/>
-          </a:bodyPr>
-          <a:lstStyle/>
-          <a:p>
-            <a:pPr>
-              <a:lnSpc>
-                <a:spcPct val="112000"/>
-              </a:lnSpc>
-              <a:spcAft>
-                <a:spcPts val="300"/>
-              </a:spcAft>
-              <a:defRPr sz="1050" b="1">
-                <a:solidFill>
-                  <a:srgbClr val="167259"/>
-                </a:solidFill>
-                <a:latin typeface="Arial"/>
-              </a:defRPr>
-            </a:pPr>
-            <a:r>
-              <a:t>RETAINED RECORD · PROPOSED</a:t>
-            </a:r>
-          </a:p>
-        </p:txBody>
-      </p:sp>
-      <p:sp>
-        <p:nvSpPr>
-          <p:cNvPr id="17" name="TextBox 16"/>
-          <p:cNvSpPr txBox="1"/>
-          <p:nvPr/>
-        </p:nvSpPr>
-        <p:spPr>
-          <a:xfrm>
-            <a:off x="8229600" y="2779776"/>
-            <a:ext cx="3273552" cy="1316736"/>
-          </a:xfrm>
-          <a:prstGeom prst="rect">
-            <a:avLst/>
-          </a:prstGeom>
-          <a:noFill/>
-        </p:spPr>
-        <p:txBody>
-          <a:bodyPr wrap="square" lIns="0" rIns="0" tIns="0" bIns="0" anchor="t">
-            <a:spAutoFit/>
-          </a:bodyPr>
-          <a:lstStyle/>
-          <a:p>
-            <a:pPr>
-              <a:lnSpc>
-                <a:spcPct val="112000"/>
-              </a:lnSpc>
-              <a:spcAft>
-                <a:spcPts val="300"/>
-              </a:spcAft>
-              <a:defRPr sz="1700" b="0">
-                <a:solidFill>
-                  <a:srgbClr val="182B43"/>
-                </a:solidFill>
-                <a:latin typeface="Arial"/>
-              </a:defRPr>
-            </a:pPr>
-            <a:r>
-              <a:t>Post-deployment assessment result and separately recorded promotion decision.</a:t>
-            </a:r>
-          </a:p>
-        </p:txBody>
-      </p:sp>
-      <p:sp>
-        <p:nvSpPr>
-          <p:cNvPr id="18" name="Rounded Rectangle 17"/>
-          <p:cNvSpPr/>
-          <p:nvPr/>
-        </p:nvSpPr>
-        <p:spPr>
-          <a:xfrm>
-            <a:off x="502920" y="4315968"/>
-            <a:ext cx="5486400" cy="1773936"/>
-          </a:xfrm>
-          <a:prstGeom prst="roundRect">
-            <a:avLst>
-              <a:gd name="adj" fmla="val 8000"/>
-            </a:avLst>
-          </a:prstGeom>
-          <a:solidFill>
-            <a:srgbClr val="F1F5F8"/>
-          </a:solidFill>
-          <a:ln w="10160">
-            <a:solidFill>
-              <a:srgbClr val="DBE2E9"/>
-            </a:solidFill>
-          </a:ln>
-        </p:spPr>
-        <p:style>
-          <a:lnRef idx="1">
-            <a:schemeClr val="accent1"/>
-          </a:lnRef>
-          <a:fillRef idx="3">
-            <a:schemeClr val="accent1"/>
-          </a:fillRef>
-          <a:effectRef idx="2">
-            <a:schemeClr val="accent1"/>
-          </a:effectRef>
-          <a:fontRef idx="minor">
-            <a:schemeClr val="lt1"/>
-          </a:fontRef>
-        </p:style>
-        <p:txBody>
-          <a:bodyPr rtlCol="0" anchor="ctr"/>
-          <a:lstStyle/>
-          <a:p>
-            <a:pPr algn="ctr"/>
-          </a:p>
-        </p:txBody>
-      </p:sp>
-      <p:sp>
-        <p:nvSpPr>
-          <p:cNvPr id="19" name="TextBox 18"/>
-          <p:cNvSpPr txBox="1"/>
-          <p:nvPr/>
-        </p:nvSpPr>
-        <p:spPr>
-          <a:xfrm>
-            <a:off x="658368" y="4462272"/>
-            <a:ext cx="5166360" cy="246888"/>
-          </a:xfrm>
-          <a:prstGeom prst="rect">
-            <a:avLst/>
-          </a:prstGeom>
-          <a:noFill/>
-        </p:spPr>
-        <p:txBody>
-          <a:bodyPr wrap="square" lIns="0" rIns="0" tIns="0" bIns="0" anchor="t">
-            <a:spAutoFit/>
-          </a:bodyPr>
-          <a:lstStyle/>
-          <a:p>
-            <a:pPr>
-              <a:lnSpc>
-                <a:spcPct val="112000"/>
-              </a:lnSpc>
-              <a:spcAft>
-                <a:spcPts val="300"/>
-              </a:spcAft>
-              <a:defRPr sz="1050" b="1">
-                <a:solidFill>
-                  <a:srgbClr val="167259"/>
-                </a:solidFill>
-                <a:latin typeface="Arial"/>
-              </a:defRPr>
-            </a:pPr>
-            <a:r>
-              <a:t>INDEPENDENT ACCEPTANCE · PROPOSED</a:t>
-            </a:r>
-          </a:p>
-        </p:txBody>
-      </p:sp>
-      <p:sp>
-        <p:nvSpPr>
-          <p:cNvPr id="20" name="TextBox 19"/>
-          <p:cNvSpPr txBox="1"/>
-          <p:nvPr/>
-        </p:nvSpPr>
-        <p:spPr>
-          <a:xfrm>
-            <a:off x="658368" y="4837176"/>
-            <a:ext cx="5148072" cy="1078992"/>
-          </a:xfrm>
-          <a:prstGeom prst="rect">
-            <a:avLst/>
-          </a:prstGeom>
-          <a:noFill/>
-        </p:spPr>
-        <p:txBody>
-          <a:bodyPr wrap="square" lIns="0" rIns="0" tIns="0" bIns="0" anchor="t">
-            <a:spAutoFit/>
-          </a:bodyPr>
-          <a:lstStyle/>
-          <a:p>
-            <a:pPr>
-              <a:lnSpc>
-                <a:spcPct val="112000"/>
-              </a:lnSpc>
-              <a:spcAft>
-                <a:spcPts val="300"/>
-              </a:spcAft>
-              <a:defRPr sz="1700" b="0">
-                <a:solidFill>
-                  <a:srgbClr val="182B43"/>
-                </a:solidFill>
-                <a:latin typeface="Arial"/>
-              </a:defRPr>
-            </a:pPr>
-            <a:r>
-              <a:t>Validate every gate outcome and cancellation path. A passing pipeline must not be represented as a complete application assessment.</a:t>
-            </a:r>
-          </a:p>
-        </p:txBody>
-      </p:sp>
-      <p:sp>
-        <p:nvSpPr>
-          <p:cNvPr id="21" name="Rounded Rectangle 20"/>
-          <p:cNvSpPr/>
-          <p:nvPr/>
-        </p:nvSpPr>
-        <p:spPr>
-          <a:xfrm>
-            <a:off x="6190488" y="4315968"/>
-            <a:ext cx="5495544" cy="1773936"/>
-          </a:xfrm>
-          <a:prstGeom prst="roundRect">
-            <a:avLst>
-              <a:gd name="adj" fmla="val 8000"/>
-            </a:avLst>
-          </a:prstGeom>
-          <a:solidFill>
-            <a:srgbClr val="FCF9F1"/>
-          </a:solidFill>
-          <a:ln w="10160">
-            <a:solidFill>
-              <a:srgbClr val="DBE2E9"/>
-            </a:solidFill>
-          </a:ln>
-        </p:spPr>
-        <p:style>
-          <a:lnRef idx="1">
-            <a:schemeClr val="accent1"/>
-          </a:lnRef>
-          <a:fillRef idx="3">
-            <a:schemeClr val="accent1"/>
-          </a:fillRef>
-          <a:effectRef idx="2">
-            <a:schemeClr val="accent1"/>
-          </a:effectRef>
-          <a:fontRef idx="minor">
-            <a:schemeClr val="lt1"/>
-          </a:fontRef>
-        </p:style>
-        <p:txBody>
-          <a:bodyPr rtlCol="0" anchor="ctr"/>
-          <a:lstStyle/>
-          <a:p>
-            <a:pPr algn="ctr"/>
-          </a:p>
-        </p:txBody>
-      </p:sp>
-      <p:sp>
-        <p:nvSpPr>
-          <p:cNvPr id="22" name="TextBox 21"/>
-          <p:cNvSpPr txBox="1"/>
-          <p:nvPr/>
-        </p:nvSpPr>
-        <p:spPr>
-          <a:xfrm>
-            <a:off x="6345936" y="4462272"/>
-            <a:ext cx="5184648" cy="246888"/>
-          </a:xfrm>
-          <a:prstGeom prst="rect">
-            <a:avLst/>
-          </a:prstGeom>
-          <a:noFill/>
-        </p:spPr>
-        <p:txBody>
-          <a:bodyPr wrap="square" lIns="0" rIns="0" tIns="0" bIns="0" anchor="t">
-            <a:spAutoFit/>
-          </a:bodyPr>
-          <a:lstStyle/>
-          <a:p>
-            <a:pPr>
-              <a:lnSpc>
-                <a:spcPct val="112000"/>
-              </a:lnSpc>
-              <a:spcAft>
-                <a:spcPts val="300"/>
-              </a:spcAft>
-              <a:defRPr sz="1050" b="1">
-                <a:solidFill>
-                  <a:srgbClr val="8B5B1C"/>
-                </a:solidFill>
-                <a:latin typeface="Arial"/>
-              </a:defRPr>
-            </a:pPr>
-            <a:r>
-              <a:t>KNOWN LIMITS AND EFFECTS</a:t>
-            </a:r>
-          </a:p>
-        </p:txBody>
-      </p:sp>
-      <p:sp>
-        <p:nvSpPr>
-          <p:cNvPr id="23" name="TextBox 22"/>
-          <p:cNvSpPr txBox="1"/>
-          <p:nvPr/>
-        </p:nvSpPr>
-        <p:spPr>
-          <a:xfrm>
-            <a:off x="6345936" y="4837176"/>
-            <a:ext cx="5148072" cy="1078992"/>
-          </a:xfrm>
-          <a:prstGeom prst="rect">
-            <a:avLst/>
-          </a:prstGeom>
-          <a:noFill/>
-        </p:spPr>
-        <p:txBody>
-          <a:bodyPr wrap="square" lIns="0" rIns="0" tIns="0" bIns="0" anchor="t">
-            <a:spAutoFit/>
-          </a:bodyPr>
-          <a:lstStyle/>
-          <a:p>
-            <a:pPr>
-              <a:lnSpc>
-                <a:spcPct val="112000"/>
-              </a:lnSpc>
-              <a:spcAft>
-                <a:spcPts val="300"/>
-              </a:spcAft>
-              <a:defRPr sz="1700" b="0">
-                <a:solidFill>
-                  <a:srgbClr val="182B43"/>
-                </a:solidFill>
-                <a:latin typeface="Arial"/>
-              </a:defRPr>
-            </a:pPr>
-            <a:r>
-              <a:t>It is not a pre-merge static check. Scoped-out changes can pass without dynamic testing; cancellation of the runner can leave a server-side job running.</a:t>
-            </a:r>
-          </a:p>
-        </p:txBody>
-      </p:sp>
-      <p:sp>
-        <p:nvSpPr>
-          <p:cNvPr id="24" name="TextBox 23"/>
-          <p:cNvSpPr txBox="1"/>
-          <p:nvPr/>
-        </p:nvSpPr>
-        <p:spPr>
-          <a:xfrm>
-            <a:off x="521207" y="6208776"/>
-            <a:ext cx="10881360" cy="155448"/>
-          </a:xfrm>
-          <a:prstGeom prst="rect">
-            <a:avLst/>
-          </a:prstGeom>
-          <a:noFill/>
-        </p:spPr>
-        <p:txBody>
-          <a:bodyPr wrap="square" lIns="0" rIns="0" tIns="0" bIns="0" anchor="t">
-            <a:spAutoFit/>
-          </a:bodyPr>
-          <a:lstStyle/>
-          <a:p>
-            <a:pPr>
-              <a:lnSpc>
-                <a:spcPct val="112000"/>
-              </a:lnSpc>
-              <a:spcAft>
-                <a:spcPts val="300"/>
-              </a:spcAft>
-              <a:defRPr sz="950" b="0">
-                <a:solidFill>
-                  <a:srgbClr val="55657A"/>
-                </a:solidFill>
-                <a:latin typeface="Arial"/>
-              </a:defRPr>
-            </a:pPr>
-            <a:r>
-              <a:t>Official source IDs: S28, S29</a:t>
-            </a:r>
-          </a:p>
-        </p:txBody>
-      </p:sp>
-    </p:spTree>
-  </p:cSld>
-  <p:clrMapOvr>
-    <a:masterClrMapping/>
-  </p:clrMapOvr>
-</p:sld>
-</file>
-
-<file path=ppt/slides/slide37.xml><?xml version="1.0" encoding="utf-8"?>
 <p:sld xmlns:a="http://schemas.openxmlformats.org/drawingml/2006/main" xmlns:p="http://schemas.openxmlformats.org/presentationml/2006/main" xmlns:r="http://schemas.openxmlformats.org/officeDocument/2006/relationships">
   <p:cSld>
     <p:bg>
